--- a/classes/parte-6-analisis-de-malware/155-malware-en-android/clase-155-presentacion.pptx
+++ b/classes/parte-6-analisis-de-malware/155-malware-en-android/clase-155-presentacion.pptx
@@ -17,6 +17,9 @@
     <p:sldId id="265" r:id="rId16"/>
     <p:sldId id="266" r:id="rId17"/>
     <p:sldId id="267" r:id="rId18"/>
+    <p:sldId id="268" r:id="rId19"/>
+    <p:sldId id="269" r:id="rId20"/>
+    <p:sldId id="270" r:id="rId21"/>
   </p:sldIdLst>
   <p:sldSz cx="9144000" cy="6858000" type="screen4x3"/>
   <p:notesSz cx="6858000" cy="9144000"/>
@@ -3198,7 +3201,7 @@
                   <a:srgbClr val="0B3D2E"/>
                 </a:solidFill>
               </a:rPr>
-              <a:t>⚠️ Errores comunes</a:t>
+              <a:t>✍️ Ejercicios</a:t>
             </a:r>
           </a:p>
         </p:txBody>
@@ -3236,67 +3239,82 @@
                   <a:srgbClr val="22282E"/>
                 </a:solidFill>
               </a:rPr>
-              <a:t>•  Instalar en el móvil personal — Riesgo real; usa solo emulador aislado</a:t>
-            </a:r>
-          </a:p>
-          <a:p>
-            <a:pPr>
-              <a:spcAft>
-                <a:spcPts val="600"/>
-              </a:spcAft>
-            </a:pPr>
-            <a:r>
-              <a:rPr sz="1500">
-                <a:solidFill>
-                  <a:srgbClr val="22282E"/>
-                </a:solidFill>
-              </a:rPr>
-              <a:t>•  jadx falla al descompilar — Ofuscación/anti-descompilación; usa Smali de apktool</a:t>
-            </a:r>
-          </a:p>
-          <a:p>
-            <a:pPr>
-              <a:spcAft>
-                <a:spcPts val="600"/>
-              </a:spcAft>
-            </a:pPr>
-            <a:r>
-              <a:rPr sz="1500">
-                <a:solidFill>
-                  <a:srgbClr val="22282E"/>
-                </a:solidFill>
-              </a:rPr>
-              <a:t>•  Sin tráfico TLS legible — Falta el CA del proxy o hay pinning; instala CA y bypass con Frida</a:t>
-            </a:r>
-          </a:p>
-          <a:p>
-            <a:pPr>
-              <a:spcAft>
-                <a:spcPts val="600"/>
-              </a:spcAft>
-            </a:pPr>
-            <a:r>
-              <a:rPr sz="1500">
-                <a:solidFill>
-                  <a:srgbClr val="22282E"/>
-                </a:solidFill>
-              </a:rPr>
-              <a:t>•  Permisos "normales" pero malicioso — Revisa accesibilidad y APIs, no solo el manifiesto</a:t>
-            </a:r>
-          </a:p>
-          <a:p>
-            <a:pPr>
-              <a:spcAft>
-                <a:spcPts val="600"/>
-              </a:spcAft>
-            </a:pPr>
-            <a:r>
-              <a:rPr sz="1500">
-                <a:solidFill>
-                  <a:srgbClr val="22282E"/>
-                </a:solidFill>
-              </a:rPr>
-              <a:t>•  Multi-DEX incompleto — La app tiene varios DEX; asegúrate de analizarlos todos</a:t>
+              <a:t>•  Enumera 6 permisos peligrosos y el abuso asociado a cada uno.</a:t>
+            </a:r>
+          </a:p>
+          <a:p>
+            <a:pPr>
+              <a:spcAft>
+                <a:spcPts val="600"/>
+              </a:spcAft>
+            </a:pPr>
+            <a:r>
+              <a:rPr sz="1500">
+                <a:solidFill>
+                  <a:srgbClr val="22282E"/>
+                </a:solidFill>
+              </a:rPr>
+              <a:t>•  Explica cómo un troyano bancario usa overlays + accesibilidad.</a:t>
+            </a:r>
+          </a:p>
+          <a:p>
+            <a:pPr>
+              <a:spcAft>
+                <a:spcPts val="600"/>
+              </a:spcAft>
+            </a:pPr>
+            <a:r>
+              <a:rPr sz="1500">
+                <a:solidFill>
+                  <a:srgbClr val="22282E"/>
+                </a:solidFill>
+              </a:rPr>
+              <a:t>•  Descompila una app y localiza el receptor de SMS.</a:t>
+            </a:r>
+          </a:p>
+          <a:p>
+            <a:pPr>
+              <a:spcAft>
+                <a:spcPts val="600"/>
+              </a:spcAft>
+            </a:pPr>
+            <a:r>
+              <a:rPr sz="1500">
+                <a:solidFill>
+                  <a:srgbClr val="22282E"/>
+                </a:solidFill>
+              </a:rPr>
+              <a:t>•  Interpreta el informe de MobSF y prioriza hallazgos.</a:t>
+            </a:r>
+          </a:p>
+          <a:p>
+            <a:pPr>
+              <a:spcAft>
+                <a:spcPts val="600"/>
+              </a:spcAft>
+            </a:pPr>
+            <a:r>
+              <a:rPr sz="1500">
+                <a:solidFill>
+                  <a:srgbClr val="22282E"/>
+                </a:solidFill>
+              </a:rPr>
+              <a:t>•  Captura tráfico C2 con mitmproxy y documenta un comando.</a:t>
+            </a:r>
+          </a:p>
+          <a:p>
+            <a:pPr>
+              <a:spcAft>
+                <a:spcPts val="600"/>
+              </a:spcAft>
+            </a:pPr>
+            <a:r>
+              <a:rPr sz="1500">
+                <a:solidFill>
+                  <a:srgbClr val="22282E"/>
+                </a:solidFill>
+              </a:rPr>
+              <a:t>•  Usa Frida para revelar una cadena cifrada en runtime.</a:t>
             </a:r>
           </a:p>
         </p:txBody>
@@ -3347,7 +3365,7 @@
                   <a:srgbClr val="0B3D2E"/>
                 </a:solidFill>
               </a:rPr>
-              <a:t>❓ Preguntas frecuentes</a:t>
+              <a:t>📝 Reto verificable</a:t>
             </a:r>
           </a:p>
         </p:txBody>
@@ -3385,37 +3403,22 @@
                   <a:srgbClr val="22282E"/>
                 </a:solidFill>
               </a:rPr>
-              <a:t>•  ❓ ¿Basta el análisis estático? Da mucho (permisos, C2, lógica), pero la ofuscación y la carga dinámica exigen análisis dinámico con emulador y Frida.</a:t>
-            </a:r>
-          </a:p>
-          <a:p>
-            <a:pPr>
-              <a:spcAft>
-                <a:spcPts val="600"/>
-              </a:spcAft>
-            </a:pPr>
-            <a:r>
-              <a:rPr sz="1500">
-                <a:solidFill>
-                  <a:srgbClr val="22282E"/>
-                </a:solidFill>
-              </a:rPr>
-              <a:t>•  ❓ ¿Qué es el certificate pinning y cómo lo supero? La app valida el certificado del servidor; para inspeccionar TLS en el lab se hace bypass con Frida en el emulador.</a:t>
-            </a:r>
-          </a:p>
-          <a:p>
-            <a:pPr>
-              <a:spcAft>
-                <a:spcPts val="600"/>
-              </a:spcAft>
-            </a:pPr>
-            <a:r>
-              <a:rPr sz="1500">
-                <a:solidFill>
-                  <a:srgbClr val="22282E"/>
-                </a:solidFill>
-              </a:rPr>
-              <a:t>•  ❓ ¿Por qué la accesibilidad es tan peligrosa? Permite leer y controlar toda la interfaz: capturar credenciales, autorizar acciones y ocultar la actividad al usuario.</a:t>
+              <a:t>•  Analiza un APK malicioso y entrega un informe con: permisos peligrosos, componentes exportados, técnica principal (overlay/SMS/spyware), C2 e IOCs, respaldado por descompilado y captura de tráfico.</a:t>
+            </a:r>
+          </a:p>
+          <a:p>
+            <a:pPr>
+              <a:spcAft>
+                <a:spcPts val="600"/>
+              </a:spcAft>
+            </a:pPr>
+            <a:r>
+              <a:rPr sz="1500">
+                <a:solidFill>
+                  <a:srgbClr val="22282E"/>
+                </a:solidFill>
+              </a:rPr>
+              <a:t>•  Criterio de aceptación: identificas la capacidad principal con la evidencia del código descompilado y capturas al menos un endpoint C2 en mitmproxy, sin haber usado un dispositivo real.</a:t>
             </a:r>
           </a:p>
         </p:txBody>
@@ -3466,7 +3469,7 @@
                   <a:srgbClr val="0B3D2E"/>
                 </a:solidFill>
               </a:rPr>
-              <a:t>🔗 Referencias</a:t>
+              <a:t>⚠️ Errores comunes</a:t>
             </a:r>
           </a:p>
         </p:txBody>
@@ -3504,6 +3507,274 @@
                   <a:srgbClr val="22282E"/>
                 </a:solidFill>
               </a:rPr>
+              <a:t>•  Instalar en el móvil personal — Riesgo real; usa solo emulador aislado</a:t>
+            </a:r>
+          </a:p>
+          <a:p>
+            <a:pPr>
+              <a:spcAft>
+                <a:spcPts val="600"/>
+              </a:spcAft>
+            </a:pPr>
+            <a:r>
+              <a:rPr sz="1500">
+                <a:solidFill>
+                  <a:srgbClr val="22282E"/>
+                </a:solidFill>
+              </a:rPr>
+              <a:t>•  jadx falla al descompilar — Ofuscación/anti-descompilación; usa Smali de apktool</a:t>
+            </a:r>
+          </a:p>
+          <a:p>
+            <a:pPr>
+              <a:spcAft>
+                <a:spcPts val="600"/>
+              </a:spcAft>
+            </a:pPr>
+            <a:r>
+              <a:rPr sz="1500">
+                <a:solidFill>
+                  <a:srgbClr val="22282E"/>
+                </a:solidFill>
+              </a:rPr>
+              <a:t>•  Sin tráfico TLS legible — Falta el CA del proxy o hay pinning; instala CA y bypass con Frida</a:t>
+            </a:r>
+          </a:p>
+          <a:p>
+            <a:pPr>
+              <a:spcAft>
+                <a:spcPts val="600"/>
+              </a:spcAft>
+            </a:pPr>
+            <a:r>
+              <a:rPr sz="1500">
+                <a:solidFill>
+                  <a:srgbClr val="22282E"/>
+                </a:solidFill>
+              </a:rPr>
+              <a:t>•  Permisos "normales" pero malicioso — Revisa accesibilidad y APIs, no solo el manifiesto</a:t>
+            </a:r>
+          </a:p>
+          <a:p>
+            <a:pPr>
+              <a:spcAft>
+                <a:spcPts val="600"/>
+              </a:spcAft>
+            </a:pPr>
+            <a:r>
+              <a:rPr sz="1500">
+                <a:solidFill>
+                  <a:srgbClr val="22282E"/>
+                </a:solidFill>
+              </a:rPr>
+              <a:t>•  Multi-DEX incompleto — La app tiene varios DEX; asegúrate de analizarlos todos</a:t>
+            </a:r>
+          </a:p>
+        </p:txBody>
+      </p:sp>
+    </p:spTree>
+  </p:cSld>
+  <p:clrMapOvr>
+    <a:masterClrMapping/>
+  </p:clrMapOvr>
+</p:sld>
+</file>
+
+<file path=ppt/slides/slide13.xml><?xml version="1.0" encoding="utf-8"?>
+<p:sld xmlns:a="http://schemas.openxmlformats.org/drawingml/2006/main" xmlns:p="http://schemas.openxmlformats.org/presentationml/2006/main" xmlns:r="http://schemas.openxmlformats.org/officeDocument/2006/relationships">
+  <p:cSld>
+    <p:spTree>
+      <p:nvGrpSpPr>
+        <p:cNvPr id="1" name=""/>
+        <p:cNvGrpSpPr/>
+        <p:nvPr/>
+      </p:nvGrpSpPr>
+      <p:grpSpPr/>
+      <p:sp>
+        <p:nvSpPr>
+          <p:cNvPr id="2" name="TextBox 1"/>
+          <p:cNvSpPr txBox="1"/>
+          <p:nvPr/>
+        </p:nvSpPr>
+        <p:spPr>
+          <a:xfrm>
+            <a:off x="457200" y="320040"/>
+            <a:ext cx="8229600" cy="822960"/>
+          </a:xfrm>
+          <a:prstGeom prst="rect">
+            <a:avLst/>
+          </a:prstGeom>
+          <a:noFill/>
+        </p:spPr>
+        <p:txBody>
+          <a:bodyPr wrap="square">
+            <a:spAutoFit/>
+          </a:bodyPr>
+          <a:lstStyle/>
+          <a:p>
+            <a:r>
+              <a:rPr sz="2600" b="1">
+                <a:solidFill>
+                  <a:srgbClr val="0B3D2E"/>
+                </a:solidFill>
+              </a:rPr>
+              <a:t>❓ Preguntas frecuentes</a:t>
+            </a:r>
+          </a:p>
+        </p:txBody>
+      </p:sp>
+      <p:sp>
+        <p:nvSpPr>
+          <p:cNvPr id="3" name="TextBox 2"/>
+          <p:cNvSpPr txBox="1"/>
+          <p:nvPr/>
+        </p:nvSpPr>
+        <p:spPr>
+          <a:xfrm>
+            <a:off x="457200" y="1280160"/>
+            <a:ext cx="8229600" cy="4937760"/>
+          </a:xfrm>
+          <a:prstGeom prst="rect">
+            <a:avLst/>
+          </a:prstGeom>
+          <a:noFill/>
+        </p:spPr>
+        <p:txBody>
+          <a:bodyPr wrap="square">
+            <a:spAutoFit/>
+          </a:bodyPr>
+          <a:lstStyle/>
+          <a:p>
+            <a:pPr>
+              <a:spcAft>
+                <a:spcPts val="600"/>
+              </a:spcAft>
+            </a:pPr>
+            <a:r>
+              <a:rPr sz="1500">
+                <a:solidFill>
+                  <a:srgbClr val="22282E"/>
+                </a:solidFill>
+              </a:rPr>
+              <a:t>•  ❓ ¿Basta el análisis estático? Da mucho (permisos, C2, lógica), pero la ofuscación y la carga dinámica exigen análisis dinámico con emulador y Frida.</a:t>
+            </a:r>
+          </a:p>
+          <a:p>
+            <a:pPr>
+              <a:spcAft>
+                <a:spcPts val="600"/>
+              </a:spcAft>
+            </a:pPr>
+            <a:r>
+              <a:rPr sz="1500">
+                <a:solidFill>
+                  <a:srgbClr val="22282E"/>
+                </a:solidFill>
+              </a:rPr>
+              <a:t>•  ❓ ¿Qué es el certificate pinning y cómo lo supero? La app valida el certificado del servidor; para inspeccionar TLS en el lab se hace bypass con Frida en el emulador.</a:t>
+            </a:r>
+          </a:p>
+          <a:p>
+            <a:pPr>
+              <a:spcAft>
+                <a:spcPts val="600"/>
+              </a:spcAft>
+            </a:pPr>
+            <a:r>
+              <a:rPr sz="1500">
+                <a:solidFill>
+                  <a:srgbClr val="22282E"/>
+                </a:solidFill>
+              </a:rPr>
+              <a:t>•  ❓ ¿Por qué la accesibilidad es tan peligrosa? Permite leer y controlar toda la interfaz: capturar credenciales, autorizar acciones y ocultar la actividad al usuario.</a:t>
+            </a:r>
+          </a:p>
+        </p:txBody>
+      </p:sp>
+    </p:spTree>
+  </p:cSld>
+  <p:clrMapOvr>
+    <a:masterClrMapping/>
+  </p:clrMapOvr>
+</p:sld>
+</file>
+
+<file path=ppt/slides/slide14.xml><?xml version="1.0" encoding="utf-8"?>
+<p:sld xmlns:a="http://schemas.openxmlformats.org/drawingml/2006/main" xmlns:p="http://schemas.openxmlformats.org/presentationml/2006/main" xmlns:r="http://schemas.openxmlformats.org/officeDocument/2006/relationships">
+  <p:cSld>
+    <p:spTree>
+      <p:nvGrpSpPr>
+        <p:cNvPr id="1" name=""/>
+        <p:cNvGrpSpPr/>
+        <p:nvPr/>
+      </p:nvGrpSpPr>
+      <p:grpSpPr/>
+      <p:sp>
+        <p:nvSpPr>
+          <p:cNvPr id="2" name="TextBox 1"/>
+          <p:cNvSpPr txBox="1"/>
+          <p:nvPr/>
+        </p:nvSpPr>
+        <p:spPr>
+          <a:xfrm>
+            <a:off x="457200" y="320040"/>
+            <a:ext cx="8229600" cy="822960"/>
+          </a:xfrm>
+          <a:prstGeom prst="rect">
+            <a:avLst/>
+          </a:prstGeom>
+          <a:noFill/>
+        </p:spPr>
+        <p:txBody>
+          <a:bodyPr wrap="square">
+            <a:spAutoFit/>
+          </a:bodyPr>
+          <a:lstStyle/>
+          <a:p>
+            <a:r>
+              <a:rPr sz="2600" b="1">
+                <a:solidFill>
+                  <a:srgbClr val="0B3D2E"/>
+                </a:solidFill>
+              </a:rPr>
+              <a:t>🔗 Referencias</a:t>
+            </a:r>
+          </a:p>
+        </p:txBody>
+      </p:sp>
+      <p:sp>
+        <p:nvSpPr>
+          <p:cNvPr id="3" name="TextBox 2"/>
+          <p:cNvSpPr txBox="1"/>
+          <p:nvPr/>
+        </p:nvSpPr>
+        <p:spPr>
+          <a:xfrm>
+            <a:off x="457200" y="1280160"/>
+            <a:ext cx="8229600" cy="4937760"/>
+          </a:xfrm>
+          <a:prstGeom prst="rect">
+            <a:avLst/>
+          </a:prstGeom>
+          <a:noFill/>
+        </p:spPr>
+        <p:txBody>
+          <a:bodyPr wrap="square">
+            <a:spAutoFit/>
+          </a:bodyPr>
+          <a:lstStyle/>
+          <a:p>
+            <a:pPr>
+              <a:spcAft>
+                <a:spcPts val="600"/>
+              </a:spcAft>
+            </a:pPr>
+            <a:r>
+              <a:rPr sz="1500">
+                <a:solidFill>
+                  <a:srgbClr val="22282E"/>
+                </a:solidFill>
+              </a:rPr>
               <a:t>•  OWASP Mobile Security Testing Guide. &lt;https://owasp.org/www-project-mobile-app-security/&gt;</a:t>
             </a:r>
           </a:p>
@@ -3569,6 +3840,81 @@
           </a:p>
         </p:txBody>
       </p:sp>
+    </p:spTree>
+  </p:cSld>
+  <p:clrMapOvr>
+    <a:masterClrMapping/>
+  </p:clrMapOvr>
+</p:sld>
+</file>
+
+<file path=ppt/slides/slide15.xml><?xml version="1.0" encoding="utf-8"?>
+<p:sld xmlns:a="http://schemas.openxmlformats.org/drawingml/2006/main" xmlns:p="http://schemas.openxmlformats.org/presentationml/2006/main" xmlns:r="http://schemas.openxmlformats.org/officeDocument/2006/relationships">
+  <p:cSld>
+    <p:spTree>
+      <p:nvGrpSpPr>
+        <p:cNvPr id="1" name=""/>
+        <p:cNvGrpSpPr/>
+        <p:nvPr/>
+      </p:nvGrpSpPr>
+      <p:grpSpPr/>
+      <p:sp>
+        <p:nvSpPr>
+          <p:cNvPr id="2" name="TextBox 1"/>
+          <p:cNvSpPr txBox="1"/>
+          <p:nvPr/>
+        </p:nvSpPr>
+        <p:spPr>
+          <a:xfrm>
+            <a:off x="457200" y="274320"/>
+            <a:ext cx="8229600" cy="640080"/>
+          </a:xfrm>
+          <a:prstGeom prst="rect">
+            <a:avLst/>
+          </a:prstGeom>
+          <a:noFill/>
+        </p:spPr>
+        <p:txBody>
+          <a:bodyPr wrap="square">
+            <a:spAutoFit/>
+          </a:bodyPr>
+          <a:lstStyle/>
+          <a:p>
+            <a:r>
+              <a:rPr sz="2200" b="1">
+                <a:solidFill>
+                  <a:srgbClr val="0B3D2E"/>
+                </a:solidFill>
+              </a:rPr>
+              <a:t>Diagrama de la clase</a:t>
+            </a:r>
+          </a:p>
+        </p:txBody>
+      </p:sp>
+      <p:pic>
+        <p:nvPicPr>
+          <p:cNvPr id="3" name="Picture 2" descr="037fb30306e57f46.png"/>
+          <p:cNvPicPr>
+            <a:picLocks noChangeAspect="1"/>
+          </p:cNvPicPr>
+          <p:nvPr/>
+        </p:nvPicPr>
+        <p:blipFill>
+          <a:blip r:embed="rId2"/>
+          <a:stretch>
+            <a:fillRect/>
+          </a:stretch>
+        </p:blipFill>
+        <p:spPr>
+          <a:xfrm>
+            <a:off x="1275546" y="1097280"/>
+            <a:ext cx="6592907" cy="5303520"/>
+          </a:xfrm>
+          <a:prstGeom prst="rect">
+            <a:avLst/>
+          </a:prstGeom>
+        </p:spPr>
+      </p:pic>
     </p:spTree>
   </p:cSld>
   <p:clrMapOvr>
@@ -3653,7 +3999,7 @@
                   <a:srgbClr val="22282E"/>
                 </a:solidFill>
               </a:rPr>
-              <a:t>•  Analizar aplicaciones Android maliciosas: entender el formato APK, descompilar el bytecode Dalvik a algo legible, revisar el manifiesto y los permisos, y reconstruir el comportamiento (robo de SMS/credenciales, overlays bancarios, spyware). El alumno aprenderá el flujo estático y dinámico con un emulador aislado.</a:t>
+              <a:t>•  Analizar aplicaciones Android maliciosas: entender el formato APK, descompilar el bytecode Dalvik a algo legible, revisar el manifiesto y los permisos, y reconstruir el comportamiento (robo de…</a:t>
             </a:r>
           </a:p>
         </p:txBody>
@@ -4047,7 +4393,7 @@
                   <a:srgbClr val="0B3D2E"/>
                 </a:solidFill>
               </a:rPr>
-              <a:t>📖 Definiciones y características</a:t>
+              <a:t>🧠 Explicación en profundidad</a:t>
             </a:r>
           </a:p>
         </p:txBody>
@@ -4085,67 +4431,97 @@
                   <a:srgbClr val="22282E"/>
                 </a:solidFill>
               </a:rPr>
-              <a:t>•  APK: paquete ZIP de una app Android. Característica clave: manifiesto + DEX + recursos.</a:t>
-            </a:r>
-          </a:p>
-          <a:p>
-            <a:pPr>
-              <a:spcAft>
-                <a:spcPts val="600"/>
-              </a:spcAft>
-            </a:pPr>
-            <a:r>
-              <a:rPr sz="1500">
-                <a:solidFill>
-                  <a:srgbClr val="22282E"/>
-                </a:solidFill>
-              </a:rPr>
-              <a:t>•  AndroidManifest.xml: declara permisos y componentes. Característica clave: mapa de capacidades.</a:t>
-            </a:r>
-          </a:p>
-          <a:p>
-            <a:pPr>
-              <a:spcAft>
-                <a:spcPts val="600"/>
-              </a:spcAft>
-            </a:pPr>
-            <a:r>
-              <a:rPr sz="1500">
-                <a:solidFill>
-                  <a:srgbClr val="22282E"/>
-                </a:solidFill>
-              </a:rPr>
-              <a:t>•  DEX / Dalvik bytecode: código ejecutable de la app. Característica clave: descompilable a Smali/Java.</a:t>
-            </a:r>
-          </a:p>
-          <a:p>
-            <a:pPr>
-              <a:spcAft>
-                <a:spcPts val="600"/>
-              </a:spcAft>
-            </a:pPr>
-            <a:r>
-              <a:rPr sz="1500">
-                <a:solidFill>
-                  <a:srgbClr val="22282E"/>
-                </a:solidFill>
-              </a:rPr>
-              <a:t>•  Accessibility abuse: uso del servicio de accesibilidad para leer/controlar la UI. Característica clave: control total de la pantalla.</a:t>
-            </a:r>
-          </a:p>
-          <a:p>
-            <a:pPr>
-              <a:spcAft>
-                <a:spcPts val="600"/>
-              </a:spcAft>
-            </a:pPr>
-            <a:r>
-              <a:rPr sz="1500">
-                <a:solidFill>
-                  <a:srgbClr val="22282E"/>
-                </a:solidFill>
-              </a:rPr>
-              <a:t>•  Overlay: ventana falsa sobre una app legítima. Característica clave: robo de credenciales bancarias.</a:t>
+              <a:t>•  Los smartphones concentran la vida digital —banca, mensajería, credenciales, ubicación—, y Android,</a:t>
+            </a:r>
+          </a:p>
+          <a:p>
+            <a:pPr>
+              <a:spcAft>
+                <a:spcPts val="600"/>
+              </a:spcAft>
+            </a:pPr>
+            <a:r>
+              <a:rPr sz="1500">
+                <a:solidFill>
+                  <a:srgbClr val="22282E"/>
+                </a:solidFill>
+              </a:rPr>
+              <a:t>•  por su cuota de mercado y su modelo más abierto (permite instalar apps fuera de la tienda oficial), es</a:t>
+            </a:r>
+          </a:p>
+          <a:p>
+            <a:pPr>
+              <a:spcAft>
+                <a:spcPts val="600"/>
+              </a:spcAft>
+            </a:pPr>
+            <a:r>
+              <a:rPr sz="1500">
+                <a:solidFill>
+                  <a:srgbClr val="22282E"/>
+                </a:solidFill>
+              </a:rPr>
+              <a:t>•  el objetivo dominante del malware móvil. El malware de Android se distribuye como APK (el formato de</a:t>
+            </a:r>
+          </a:p>
+          <a:p>
+            <a:pPr>
+              <a:spcAft>
+                <a:spcPts val="600"/>
+              </a:spcAft>
+            </a:pPr>
+            <a:r>
+              <a:rPr sz="1500">
+                <a:solidFill>
+                  <a:srgbClr val="22282E"/>
+                </a:solidFill>
+              </a:rPr>
+              <a:t>•  las apps), a menudo disfrazado de una app legítima, y su análisis tiene un instrumental propio porque no</a:t>
+            </a:r>
+          </a:p>
+          <a:p>
+            <a:pPr>
+              <a:spcAft>
+                <a:spcPts val="600"/>
+              </a:spcAft>
+            </a:pPr>
+            <a:r>
+              <a:rPr sz="1500">
+                <a:solidFill>
+                  <a:srgbClr val="22282E"/>
+                </a:solidFill>
+              </a:rPr>
+              <a:t>•  es código nativo compilado sino, principalmente, bytecode que se puede decompilar de vuelta a un</a:t>
+            </a:r>
+          </a:p>
+          <a:p>
+            <a:pPr>
+              <a:spcAft>
+                <a:spcPts val="600"/>
+              </a:spcAft>
+            </a:pPr>
+            <a:r>
+              <a:rPr sz="1500">
+                <a:solidFill>
+                  <a:srgbClr val="22282E"/>
+                </a:solidFill>
+              </a:rPr>
+              <a:t>•  Java casi legible —lo que hace el análisis de Android, en cierto sentido, más accesible que el de un</a:t>
+            </a:r>
+          </a:p>
+          <a:p>
+            <a:pPr>
+              <a:spcAft>
+                <a:spcPts val="600"/>
+              </a:spcAft>
+            </a:pPr>
+            <a:r>
+              <a:rPr sz="1500">
+                <a:solidFill>
+                  <a:srgbClr val="22282E"/>
+                </a:solidFill>
+              </a:rPr>
+              <a:t>•  binario x86 stripped—.</a:t>
             </a:r>
           </a:p>
         </p:txBody>
@@ -4196,7 +4572,7 @@
                   <a:srgbClr val="0B3D2E"/>
                 </a:solidFill>
               </a:rPr>
-              <a:t>🧰 Herramientas y preparación</a:t>
+              <a:t>📖 Definiciones y características</a:t>
             </a:r>
           </a:p>
         </p:txBody>
@@ -4234,52 +4610,67 @@
                   <a:srgbClr val="22282E"/>
                 </a:solidFill>
               </a:rPr>
-              <a:t>•  apktool (desempaqueta y decodifica el manifiesto/Smali).</a:t>
-            </a:r>
-          </a:p>
-          <a:p>
-            <a:pPr>
-              <a:spcAft>
-                <a:spcPts val="600"/>
-              </a:spcAft>
-            </a:pPr>
-            <a:r>
-              <a:rPr sz="1500">
-                <a:solidFill>
-                  <a:srgbClr val="22282E"/>
-                </a:solidFill>
-              </a:rPr>
-              <a:t>•  jadx / jadx-gui (descompila DEX a Java).</a:t>
-            </a:r>
-          </a:p>
-          <a:p>
-            <a:pPr>
-              <a:spcAft>
-                <a:spcPts val="600"/>
-              </a:spcAft>
-            </a:pPr>
-            <a:r>
-              <a:rPr sz="1500">
-                <a:solidFill>
-                  <a:srgbClr val="22282E"/>
-                </a:solidFill>
-              </a:rPr>
-              <a:t>•  MobSF (análisis estático y dinámico automatizado).</a:t>
-            </a:r>
-          </a:p>
-          <a:p>
-            <a:pPr>
-              <a:spcAft>
-                <a:spcPts val="600"/>
-              </a:spcAft>
-            </a:pPr>
-            <a:r>
-              <a:rPr sz="1500">
-                <a:solidFill>
-                  <a:srgbClr val="22282E"/>
-                </a:solidFill>
-              </a:rPr>
-              <a:t>•  Android Emulator/Genymotion aislado, Frida (instrumentación), mitmproxy (tráfico TLS).</a:t>
+              <a:t>•  APK: paquete ZIP de una app Android. Característica clave: manifiesto + DEX + recursos.</a:t>
+            </a:r>
+          </a:p>
+          <a:p>
+            <a:pPr>
+              <a:spcAft>
+                <a:spcPts val="600"/>
+              </a:spcAft>
+            </a:pPr>
+            <a:r>
+              <a:rPr sz="1500">
+                <a:solidFill>
+                  <a:srgbClr val="22282E"/>
+                </a:solidFill>
+              </a:rPr>
+              <a:t>•  AndroidManifest.xml: declara permisos y componentes. Característica clave: mapa de capacidades.</a:t>
+            </a:r>
+          </a:p>
+          <a:p>
+            <a:pPr>
+              <a:spcAft>
+                <a:spcPts val="600"/>
+              </a:spcAft>
+            </a:pPr>
+            <a:r>
+              <a:rPr sz="1500">
+                <a:solidFill>
+                  <a:srgbClr val="22282E"/>
+                </a:solidFill>
+              </a:rPr>
+              <a:t>•  DEX / Dalvik bytecode: código ejecutable de la app. Característica clave: descompilable a Smali/Java.</a:t>
+            </a:r>
+          </a:p>
+          <a:p>
+            <a:pPr>
+              <a:spcAft>
+                <a:spcPts val="600"/>
+              </a:spcAft>
+            </a:pPr>
+            <a:r>
+              <a:rPr sz="1500">
+                <a:solidFill>
+                  <a:srgbClr val="22282E"/>
+                </a:solidFill>
+              </a:rPr>
+              <a:t>•  Accessibility abuse: uso del servicio de accesibilidad para leer/controlar la UI. Característica clave: control total de la pantalla.</a:t>
+            </a:r>
+          </a:p>
+          <a:p>
+            <a:pPr>
+              <a:spcAft>
+                <a:spcPts val="600"/>
+              </a:spcAft>
+            </a:pPr>
+            <a:r>
+              <a:rPr sz="1500">
+                <a:solidFill>
+                  <a:srgbClr val="22282E"/>
+                </a:solidFill>
+              </a:rPr>
+              <a:t>•  Overlay: ventana falsa sobre una app legítima. Característica clave: robo de credenciales bancarias.</a:t>
             </a:r>
           </a:p>
         </p:txBody>
@@ -4330,7 +4721,7 @@
                   <a:srgbClr val="0B3D2E"/>
                 </a:solidFill>
               </a:rPr>
-              <a:t>🧪 Laboratorio guiado</a:t>
+              <a:t>📔 Glosario</a:t>
             </a:r>
           </a:p>
         </p:txBody>
@@ -4368,97 +4759,97 @@
                   <a:srgbClr val="22282E"/>
                 </a:solidFill>
               </a:rPr>
-              <a:t>•  Estático:</a:t>
-            </a:r>
-          </a:p>
-          <a:p>
-            <a:pPr>
-              <a:spcAft>
-                <a:spcPts val="600"/>
-              </a:spcAft>
-            </a:pPr>
-            <a:r>
-              <a:rPr sz="1500">
-                <a:solidFill>
-                  <a:srgbClr val="22282E"/>
-                </a:solidFill>
-              </a:rPr>
-              <a:t>•  Desempaqueta: apktool d muestra.apk. Revisa AndroidManifest.xml: permisos (READSMS, SYSTEMALERTWINDOW, BINDACCESSIBILITYSERVICE) y componentes exported.</a:t>
-            </a:r>
-          </a:p>
-          <a:p>
-            <a:pPr>
-              <a:spcAft>
-                <a:spcPts val="600"/>
-              </a:spcAft>
-            </a:pPr>
-            <a:r>
-              <a:rPr sz="1500">
-                <a:solidFill>
-                  <a:srgbClr val="22282E"/>
-                </a:solidFill>
-              </a:rPr>
-              <a:t>•  Descompila a Java con jadx-gui muestra.apk. Localiza el Application/servicios y sigue el flujo desde onCreate/receivers de SMS.</a:t>
-            </a:r>
-          </a:p>
-          <a:p>
-            <a:pPr>
-              <a:spcAft>
-                <a:spcPts val="600"/>
-              </a:spcAft>
-            </a:pPr>
-            <a:r>
-              <a:rPr sz="1500">
-                <a:solidFill>
-                  <a:srgbClr val="22282E"/>
-                </a:solidFill>
-              </a:rPr>
-              <a:t>•  Busca strings de C2 (URLs, endpoints), claves de cifrado y llamadas a SmsManager, AccessibilityService, WebView (overlays).</a:t>
-            </a:r>
-          </a:p>
-          <a:p>
-            <a:pPr>
-              <a:spcAft>
-                <a:spcPts val="600"/>
-              </a:spcAft>
-            </a:pPr>
-            <a:r>
-              <a:rPr sz="1500">
-                <a:solidFill>
-                  <a:srgbClr val="22282E"/>
-                </a:solidFill>
-              </a:rPr>
-              <a:t>•  Corre MobSF para un informe automatizado y contrástalo con tu lectura manual.</a:t>
-            </a:r>
-          </a:p>
-          <a:p>
-            <a:pPr>
-              <a:spcAft>
-                <a:spcPts val="600"/>
-              </a:spcAft>
-            </a:pPr>
-            <a:r>
-              <a:rPr sz="1500">
-                <a:solidFill>
-                  <a:srgbClr val="22282E"/>
-                </a:solidFill>
-              </a:rPr>
-              <a:t>•  Dinámico:</a:t>
-            </a:r>
-          </a:p>
-          <a:p>
-            <a:pPr>
-              <a:spcAft>
-                <a:spcPts val="600"/>
-              </a:spcAft>
-            </a:pPr>
-            <a:r>
-              <a:rPr sz="1500">
-                <a:solidFill>
-                  <a:srgbClr val="22282E"/>
-                </a:solidFill>
-              </a:rPr>
-              <a:t>•  Instala el APK en el emulador aislado (adb install muestra.apk) con snapshot previo.</a:t>
+              <a:t>•  Término — Definición concisa</a:t>
+            </a:r>
+          </a:p>
+          <a:p>
+            <a:pPr>
+              <a:spcAft>
+                <a:spcPts val="600"/>
+              </a:spcAft>
+            </a:pPr>
+            <a:r>
+              <a:rPr sz="1500">
+                <a:solidFill>
+                  <a:srgbClr val="22282E"/>
+                </a:solidFill>
+              </a:rPr>
+              <a:t>•  Malware de Android — Malware móvil distribuido como APK</a:t>
+            </a:r>
+          </a:p>
+          <a:p>
+            <a:pPr>
+              <a:spcAft>
+                <a:spcPts val="600"/>
+              </a:spcAft>
+            </a:pPr>
+            <a:r>
+              <a:rPr sz="1500">
+                <a:solidFill>
+                  <a:srgbClr val="22282E"/>
+                </a:solidFill>
+              </a:rPr>
+              <a:t>•  APK — Archivo ZIP que empaqueta una app Android</a:t>
+            </a:r>
+          </a:p>
+          <a:p>
+            <a:pPr>
+              <a:spcAft>
+                <a:spcPts val="600"/>
+              </a:spcAft>
+            </a:pPr>
+            <a:r>
+              <a:rPr sz="1500">
+                <a:solidFill>
+                  <a:srgbClr val="22282E"/>
+                </a:solidFill>
+              </a:rPr>
+              <a:t>•  AndroidManifest.xml — Declara permisos y componentes de la app</a:t>
+            </a:r>
+          </a:p>
+          <a:p>
+            <a:pPr>
+              <a:spcAft>
+                <a:spcPts val="600"/>
+              </a:spcAft>
+            </a:pPr>
+            <a:r>
+              <a:rPr sz="1500">
+                <a:solidFill>
+                  <a:srgbClr val="22282E"/>
+                </a:solidFill>
+              </a:rPr>
+              <a:t>•  Permiso peligroso — SMS, contactos, ubicación, Accessibility</a:t>
+            </a:r>
+          </a:p>
+          <a:p>
+            <a:pPr>
+              <a:spcAft>
+                <a:spcPts val="600"/>
+              </a:spcAft>
+            </a:pPr>
+            <a:r>
+              <a:rPr sz="1500">
+                <a:solidFill>
+                  <a:srgbClr val="22282E"/>
+                </a:solidFill>
+              </a:rPr>
+              <a:t>•  Componente exportado — Accesible desde otras apps; superficie de ataque</a:t>
+            </a:r>
+          </a:p>
+          <a:p>
+            <a:pPr>
+              <a:spcAft>
+                <a:spcPts val="600"/>
+              </a:spcAft>
+            </a:pPr>
+            <a:r>
+              <a:rPr sz="1500">
+                <a:solidFill>
+                  <a:srgbClr val="22282E"/>
+                </a:solidFill>
+              </a:rPr>
+              <a:t>•  Bytecode Dalvik — Código compilado que corre en ART/Dalvik</a:t>
             </a:r>
           </a:p>
         </p:txBody>
@@ -4509,7 +4900,7 @@
                   <a:srgbClr val="0B3D2E"/>
                 </a:solidFill>
               </a:rPr>
-              <a:t>✍️ Ejercicios</a:t>
+              <a:t>🧰 Herramientas y preparación</a:t>
             </a:r>
           </a:p>
         </p:txBody>
@@ -4547,82 +4938,52 @@
                   <a:srgbClr val="22282E"/>
                 </a:solidFill>
               </a:rPr>
-              <a:t>•  Enumera 6 permisos peligrosos y el abuso asociado a cada uno.</a:t>
-            </a:r>
-          </a:p>
-          <a:p>
-            <a:pPr>
-              <a:spcAft>
-                <a:spcPts val="600"/>
-              </a:spcAft>
-            </a:pPr>
-            <a:r>
-              <a:rPr sz="1500">
-                <a:solidFill>
-                  <a:srgbClr val="22282E"/>
-                </a:solidFill>
-              </a:rPr>
-              <a:t>•  Explica cómo un troyano bancario usa overlays + accesibilidad.</a:t>
-            </a:r>
-          </a:p>
-          <a:p>
-            <a:pPr>
-              <a:spcAft>
-                <a:spcPts val="600"/>
-              </a:spcAft>
-            </a:pPr>
-            <a:r>
-              <a:rPr sz="1500">
-                <a:solidFill>
-                  <a:srgbClr val="22282E"/>
-                </a:solidFill>
-              </a:rPr>
-              <a:t>•  Descompila una app y localiza el receptor de SMS.</a:t>
-            </a:r>
-          </a:p>
-          <a:p>
-            <a:pPr>
-              <a:spcAft>
-                <a:spcPts val="600"/>
-              </a:spcAft>
-            </a:pPr>
-            <a:r>
-              <a:rPr sz="1500">
-                <a:solidFill>
-                  <a:srgbClr val="22282E"/>
-                </a:solidFill>
-              </a:rPr>
-              <a:t>•  Interpreta el informe de MobSF y prioriza hallazgos.</a:t>
-            </a:r>
-          </a:p>
-          <a:p>
-            <a:pPr>
-              <a:spcAft>
-                <a:spcPts val="600"/>
-              </a:spcAft>
-            </a:pPr>
-            <a:r>
-              <a:rPr sz="1500">
-                <a:solidFill>
-                  <a:srgbClr val="22282E"/>
-                </a:solidFill>
-              </a:rPr>
-              <a:t>•  Captura tráfico C2 con mitmproxy y documenta un comando.</a:t>
-            </a:r>
-          </a:p>
-          <a:p>
-            <a:pPr>
-              <a:spcAft>
-                <a:spcPts val="600"/>
-              </a:spcAft>
-            </a:pPr>
-            <a:r>
-              <a:rPr sz="1500">
-                <a:solidFill>
-                  <a:srgbClr val="22282E"/>
-                </a:solidFill>
-              </a:rPr>
-              <a:t>•  Usa Frida para revelar una cadena cifrada en runtime.</a:t>
+              <a:t>•  apktool (desempaqueta y decodifica el manifiesto/Smali).</a:t>
+            </a:r>
+          </a:p>
+          <a:p>
+            <a:pPr>
+              <a:spcAft>
+                <a:spcPts val="600"/>
+              </a:spcAft>
+            </a:pPr>
+            <a:r>
+              <a:rPr sz="1500">
+                <a:solidFill>
+                  <a:srgbClr val="22282E"/>
+                </a:solidFill>
+              </a:rPr>
+              <a:t>•  jadx / jadx-gui (descompila DEX a Java).</a:t>
+            </a:r>
+          </a:p>
+          <a:p>
+            <a:pPr>
+              <a:spcAft>
+                <a:spcPts val="600"/>
+              </a:spcAft>
+            </a:pPr>
+            <a:r>
+              <a:rPr sz="1500">
+                <a:solidFill>
+                  <a:srgbClr val="22282E"/>
+                </a:solidFill>
+              </a:rPr>
+              <a:t>•  MobSF (análisis estático y dinámico automatizado).</a:t>
+            </a:r>
+          </a:p>
+          <a:p>
+            <a:pPr>
+              <a:spcAft>
+                <a:spcPts val="600"/>
+              </a:spcAft>
+            </a:pPr>
+            <a:r>
+              <a:rPr sz="1500">
+                <a:solidFill>
+                  <a:srgbClr val="22282E"/>
+                </a:solidFill>
+              </a:rPr>
+              <a:t>•  Android Emulator/Genymotion aislado, Frida (instrumentación), mitmproxy (tráfico TLS).</a:t>
             </a:r>
           </a:p>
         </p:txBody>
@@ -4673,7 +5034,7 @@
                   <a:srgbClr val="0B3D2E"/>
                 </a:solidFill>
               </a:rPr>
-              <a:t>📝 Reto verificable</a:t>
+              <a:t>🧪 Laboratorio guiado</a:t>
             </a:r>
           </a:p>
         </p:txBody>
@@ -4711,22 +5072,97 @@
                   <a:srgbClr val="22282E"/>
                 </a:solidFill>
               </a:rPr>
-              <a:t>•  Analiza un APK malicioso y entrega un informe con: permisos peligrosos, componentes exportados, técnica principal (overlay/SMS/spyware), C2 e IOCs, respaldado por descompilado y captura de tráfico.</a:t>
-            </a:r>
-          </a:p>
-          <a:p>
-            <a:pPr>
-              <a:spcAft>
-                <a:spcPts val="600"/>
-              </a:spcAft>
-            </a:pPr>
-            <a:r>
-              <a:rPr sz="1500">
-                <a:solidFill>
-                  <a:srgbClr val="22282E"/>
-                </a:solidFill>
-              </a:rPr>
-              <a:t>•  Criterio de aceptación: identificas la capacidad principal con la evidencia del código descompilado y capturas al menos un endpoint C2 en mitmproxy, sin haber usado un dispositivo real.</a:t>
+              <a:t>•  Estático:</a:t>
+            </a:r>
+          </a:p>
+          <a:p>
+            <a:pPr>
+              <a:spcAft>
+                <a:spcPts val="600"/>
+              </a:spcAft>
+            </a:pPr>
+            <a:r>
+              <a:rPr sz="1500">
+                <a:solidFill>
+                  <a:srgbClr val="22282E"/>
+                </a:solidFill>
+              </a:rPr>
+              <a:t>•  Desempaqueta: apktool d muestra.apk. Revisa AndroidManifest.xml: permisos (READSMS, SYSTEMALERTWINDOW, BINDACCESSIBILITYSERVICE) y componentes exported.</a:t>
+            </a:r>
+          </a:p>
+          <a:p>
+            <a:pPr>
+              <a:spcAft>
+                <a:spcPts val="600"/>
+              </a:spcAft>
+            </a:pPr>
+            <a:r>
+              <a:rPr sz="1500">
+                <a:solidFill>
+                  <a:srgbClr val="22282E"/>
+                </a:solidFill>
+              </a:rPr>
+              <a:t>•  Descompila a Java con jadx-gui muestra.apk. Localiza el Application/servicios y sigue el flujo desde onCreate/receivers de SMS.</a:t>
+            </a:r>
+          </a:p>
+          <a:p>
+            <a:pPr>
+              <a:spcAft>
+                <a:spcPts val="600"/>
+              </a:spcAft>
+            </a:pPr>
+            <a:r>
+              <a:rPr sz="1500">
+                <a:solidFill>
+                  <a:srgbClr val="22282E"/>
+                </a:solidFill>
+              </a:rPr>
+              <a:t>•  Busca strings de C2 (URLs, endpoints), claves de cifrado y llamadas a SmsManager, AccessibilityService, WebView (overlays).</a:t>
+            </a:r>
+          </a:p>
+          <a:p>
+            <a:pPr>
+              <a:spcAft>
+                <a:spcPts val="600"/>
+              </a:spcAft>
+            </a:pPr>
+            <a:r>
+              <a:rPr sz="1500">
+                <a:solidFill>
+                  <a:srgbClr val="22282E"/>
+                </a:solidFill>
+              </a:rPr>
+              <a:t>•  Corre MobSF para un informe automatizado y contrástalo con tu lectura manual.</a:t>
+            </a:r>
+          </a:p>
+          <a:p>
+            <a:pPr>
+              <a:spcAft>
+                <a:spcPts val="600"/>
+              </a:spcAft>
+            </a:pPr>
+            <a:r>
+              <a:rPr sz="1500">
+                <a:solidFill>
+                  <a:srgbClr val="22282E"/>
+                </a:solidFill>
+              </a:rPr>
+              <a:t>•  Dinámico:</a:t>
+            </a:r>
+          </a:p>
+          <a:p>
+            <a:pPr>
+              <a:spcAft>
+                <a:spcPts val="600"/>
+              </a:spcAft>
+            </a:pPr>
+            <a:r>
+              <a:rPr sz="1500">
+                <a:solidFill>
+                  <a:srgbClr val="22282E"/>
+                </a:solidFill>
+              </a:rPr>
+              <a:t>•  Instala el APK en el emulador aislado (adb install muestra.apk) con snapshot previo.</a:t>
             </a:r>
           </a:p>
         </p:txBody>
